--- a/output/wordlabs-bad-3day.pptx
+++ b/output/wordlabs-bad-3day.pptx
@@ -4240,7 +4240,7 @@
                 <a:ea typeface="Calibri" pitchFamily="34" charset="-122"/>
                 <a:cs typeface="Calibri" pitchFamily="34" charset="-120"/>
               </a:rPr>
-              <a:t>"not good, harmful, wrong"</a:t>
+              <a:t>"not good, harmful, unpleasant"</a:t>
             </a:r>
             <a:endParaRPr lang="en-US" sz="2200" dirty="0"/>
           </a:p>
@@ -5288,7 +5288,7 @@
                 <a:ea typeface="Calibri" pitchFamily="34" charset="-122"/>
                 <a:cs typeface="Calibri" pitchFamily="34" charset="-120"/>
               </a:rPr>
-              <a:t>Word Labs  •  wordlabs.app  •  Root: 'bad' = not good, harmful, wrong</a:t>
+              <a:t>Word Labs  •  wordlabs.app  •  Root: 'bad' = not good, harmful, unpleasant</a:t>
             </a:r>
             <a:endParaRPr lang="en-US" sz="800" dirty="0"/>
           </a:p>
@@ -5928,7 +5928,7 @@
                 <a:ea typeface="Calibri" pitchFamily="34" charset="-122"/>
                 <a:cs typeface="Calibri" pitchFamily="34" charset="-120"/>
               </a:rPr>
-              <a:t>Word Labs  •  wordlabs.app  •  Root: 'bad' = not good, harmful, wrong</a:t>
+              <a:t>Word Labs  •  wordlabs.app  •  Root: 'bad' = not good, harmful, unpleasant</a:t>
             </a:r>
             <a:endParaRPr lang="en-US" sz="800" dirty="0"/>
           </a:p>
@@ -6040,7 +6040,7 @@
                 <a:ea typeface="Calibri" pitchFamily="34" charset="-122"/>
                 <a:cs typeface="Calibri" pitchFamily="34" charset="-120"/>
               </a:rPr>
-              <a:t>She felt </a:t>
+              <a:t>He behaved </a:t>
             </a:r>
             <a:pPr algn="l" indent="0" marL="0">
               <a:buNone/>
@@ -6071,7 +6071,7 @@
                 <a:ea typeface="Calibri" pitchFamily="34" charset="-122"/>
                 <a:cs typeface="Calibri" pitchFamily="34" charset="-120"/>
               </a:rPr>
-              <a:t> about forgetting her friend's birthday, so she admitted her </a:t>
+              <a:t> at the party, which showed real </a:t>
             </a:r>
             <a:pPr algn="l" indent="0" marL="0">
               <a:buNone/>
@@ -6102,7 +6102,7 @@
                 <a:ea typeface="Calibri" pitchFamily="34" charset="-122"/>
                 <a:cs typeface="Calibri" pitchFamily="34" charset="-120"/>
               </a:rPr>
-              <a:t> straight away.</a:t>
+              <a:t> of character.</a:t>
             </a:r>
             <a:endParaRPr lang="en-US" sz="1800" dirty="0"/>
           </a:p>
@@ -6716,7 +6716,7 @@
                 <a:ea typeface="Calibri" pitchFamily="34" charset="-122"/>
                 <a:cs typeface="Calibri" pitchFamily="34" charset="-120"/>
               </a:rPr>
-              <a:t>Word Labs  •  wordlabs.app  •  Root: 'bad' = not good, harmful, wrong</a:t>
+              <a:t>Word Labs  •  wordlabs.app  •  Root: 'bad' = not good, harmful, unpleasant</a:t>
             </a:r>
             <a:endParaRPr lang="en-US" sz="800" dirty="0"/>
           </a:p>
@@ -7543,7 +7543,7 @@
                 <a:ea typeface="Calibri" pitchFamily="34" charset="-122"/>
                 <a:cs typeface="Calibri" pitchFamily="34" charset="-120"/>
               </a:rPr>
-              <a:t>Word Labs  •  wordlabs.app  •  Root: 'bad' = not good, harmful, wrong</a:t>
+              <a:t>Word Labs  •  wordlabs.app  •  Root: 'bad' = not good, harmful, unpleasant</a:t>
             </a:r>
             <a:endParaRPr lang="en-US" sz="800" dirty="0"/>
           </a:p>
@@ -7972,7 +7972,7 @@
                 <a:ea typeface="Calibri" pitchFamily="34" charset="-122"/>
                 <a:cs typeface="Calibri" pitchFamily="34" charset="-120"/>
               </a:rPr>
-              <a:t>in a way that is</a:t>
+              <a:t>in a certain way</a:t>
             </a:r>
             <a:endParaRPr lang="en-US" sz="850" dirty="0"/>
           </a:p>
@@ -8528,7 +8528,7 @@
                 <a:ea typeface="Calibri" pitchFamily="34" charset="-122"/>
                 <a:cs typeface="Calibri" pitchFamily="34" charset="-120"/>
               </a:rPr>
-              <a:t>Word Labs  •  wordlabs.app  •  Root: 'bad' = not good, harmful, wrong</a:t>
+              <a:t>Word Labs  •  wordlabs.app  •  Root: 'bad' = not good, harmful, unpleasant</a:t>
             </a:r>
             <a:endParaRPr lang="en-US" sz="800" dirty="0"/>
           </a:p>
@@ -8957,7 +8957,7 @@
                 <a:ea typeface="Calibri" pitchFamily="34" charset="-122"/>
                 <a:cs typeface="Calibri" pitchFamily="34" charset="-120"/>
               </a:rPr>
-              <a:t>in a way that is</a:t>
+              <a:t>in a certain way</a:t>
             </a:r>
             <a:endParaRPr lang="en-US" sz="850" dirty="0"/>
           </a:p>
@@ -9645,7 +9645,7 @@
                 <a:ea typeface="Calibri" pitchFamily="34" charset="-122"/>
                 <a:cs typeface="Calibri" pitchFamily="34" charset="-120"/>
               </a:rPr>
-              <a:t>Word Labs  •  wordlabs.app  •  Root: 'bad' = not good, harmful, wrong</a:t>
+              <a:t>Word Labs  •  wordlabs.app  •  Root: 'bad' = not good, harmful, unpleasant</a:t>
             </a:r>
             <a:endParaRPr lang="en-US" sz="800" dirty="0"/>
           </a:p>
@@ -10074,7 +10074,7 @@
                 <a:ea typeface="Calibri" pitchFamily="34" charset="-122"/>
                 <a:cs typeface="Calibri" pitchFamily="34" charset="-120"/>
               </a:rPr>
-              <a:t>in a way that is</a:t>
+              <a:t>in a certain way</a:t>
             </a:r>
             <a:endParaRPr lang="en-US" sz="850" dirty="0"/>
           </a:p>
@@ -11053,7 +11053,7 @@
                 <a:ea typeface="Calibri" pitchFamily="34" charset="-122"/>
                 <a:cs typeface="Calibri" pitchFamily="34" charset="-120"/>
               </a:rPr>
-              <a:t>Word Labs  •  wordlabs.app  •  Root: 'bad' = not good, harmful, wrong</a:t>
+              <a:t>Word Labs  •  wordlabs.app  •  Root: 'bad' = not good, harmful, unpleasant</a:t>
             </a:r>
             <a:endParaRPr lang="en-US" sz="800" dirty="0"/>
           </a:p>
@@ -11880,7 +11880,7 @@
                 <a:ea typeface="Calibri" pitchFamily="34" charset="-122"/>
                 <a:cs typeface="Calibri" pitchFamily="34" charset="-120"/>
               </a:rPr>
-              <a:t>Word Labs  •  wordlabs.app  •  Root: 'bad' = not good, harmful, wrong</a:t>
+              <a:t>Word Labs  •  wordlabs.app  •  Root: 'bad' = not good, harmful, unpleasant</a:t>
             </a:r>
             <a:endParaRPr lang="en-US" sz="800" dirty="0"/>
           </a:p>
@@ -12309,7 +12309,7 @@
                 <a:ea typeface="Calibri" pitchFamily="34" charset="-122"/>
                 <a:cs typeface="Calibri" pitchFamily="34" charset="-120"/>
               </a:rPr>
-              <a:t>the state or quality of</a:t>
+              <a:t>state or quality of</a:t>
             </a:r>
             <a:endParaRPr lang="en-US" sz="850" dirty="0"/>
           </a:p>
@@ -12865,7 +12865,7 @@
                 <a:ea typeface="Calibri" pitchFamily="34" charset="-122"/>
                 <a:cs typeface="Calibri" pitchFamily="34" charset="-120"/>
               </a:rPr>
-              <a:t>Word Labs  •  wordlabs.app  •  Root: 'bad' = not good, harmful, wrong</a:t>
+              <a:t>Word Labs  •  wordlabs.app  •  Root: 'bad' = not good, harmful, unpleasant</a:t>
             </a:r>
             <a:endParaRPr lang="en-US" sz="800" dirty="0"/>
           </a:p>
@@ -13294,7 +13294,7 @@
                 <a:ea typeface="Calibri" pitchFamily="34" charset="-122"/>
                 <a:cs typeface="Calibri" pitchFamily="34" charset="-120"/>
               </a:rPr>
-              <a:t>the state or quality of</a:t>
+              <a:t>state or quality of</a:t>
             </a:r>
             <a:endParaRPr lang="en-US" sz="850" dirty="0"/>
           </a:p>
@@ -13891,7 +13891,7 @@
                 <a:ea typeface="Calibri" pitchFamily="34" charset="-122"/>
                 <a:cs typeface="Calibri" pitchFamily="34" charset="-120"/>
               </a:rPr>
-              <a:t>Root 'bad' — not good, harmful, wrong</a:t>
+              <a:t>Root 'bad' — not good, harmful, unpleasant</a:t>
             </a:r>
             <a:endParaRPr lang="en-US" sz="1600" dirty="0"/>
           </a:p>
@@ -14247,7 +14247,7 @@
                 <a:ea typeface="Calibri" pitchFamily="34" charset="-122"/>
                 <a:cs typeface="Calibri" pitchFamily="34" charset="-120"/>
               </a:rPr>
-              <a:t>Word Labs  •  wordlabs.app  •  Root: 'bad' = not good, harmful, wrong</a:t>
+              <a:t>Word Labs  •  wordlabs.app  •  Root: 'bad' = not good, harmful, unpleasant</a:t>
             </a:r>
             <a:endParaRPr lang="en-US" sz="800" dirty="0"/>
           </a:p>
@@ -14676,7 +14676,7 @@
                 <a:ea typeface="Calibri" pitchFamily="34" charset="-122"/>
                 <a:cs typeface="Calibri" pitchFamily="34" charset="-120"/>
               </a:rPr>
-              <a:t>the state or quality of</a:t>
+              <a:t>state or quality of</a:t>
             </a:r>
             <a:endParaRPr lang="en-US" sz="850" dirty="0"/>
           </a:p>
@@ -16003,7 +16003,7 @@
                 <a:ea typeface="Calibri" pitchFamily="34" charset="-122"/>
                 <a:cs typeface="Calibri" pitchFamily="34" charset="-120"/>
               </a:rPr>
-              <a:t>Word Labs  •  wordlabs.app  •  Root: 'bad' = not good, harmful, wrong</a:t>
+              <a:t>Word Labs  •  wordlabs.app  •  Root: 'bad' = not good, harmful, unpleasant</a:t>
             </a:r>
             <a:endParaRPr lang="en-US" sz="800" dirty="0"/>
           </a:p>
@@ -16643,7 +16643,7 @@
                 <a:ea typeface="Calibri" pitchFamily="34" charset="-122"/>
                 <a:cs typeface="Calibri" pitchFamily="34" charset="-120"/>
               </a:rPr>
-              <a:t>Word Labs  •  wordlabs.app  •  Root: 'bad' = not good, harmful, wrong</a:t>
+              <a:t>Word Labs  •  wordlabs.app  •  Root: 'bad' = not good, harmful, unpleasant</a:t>
             </a:r>
             <a:endParaRPr lang="en-US" sz="800" dirty="0"/>
           </a:p>
@@ -16786,7 +16786,7 @@
                 <a:ea typeface="Calibri" pitchFamily="34" charset="-122"/>
                 <a:cs typeface="Calibri" pitchFamily="34" charset="-120"/>
               </a:rPr>
-              <a:t> character in the story behaved </a:t>
+              <a:t> villain in the story did the </a:t>
             </a:r>
             <a:pPr algn="l" indent="0" marL="0">
               <a:buNone/>
@@ -16803,7 +16803,7 @@
                 <a:ea typeface="Calibri" pitchFamily="34" charset="-122"/>
                 <a:cs typeface="Calibri" pitchFamily="34" charset="-120"/>
               </a:rPr>
-              <a:t>badly</a:t>
+              <a:t>baddest</a:t>
             </a:r>
             <a:pPr algn="l" indent="0" marL="0">
               <a:buNone/>
@@ -16817,7 +16817,7 @@
                 <a:ea typeface="Calibri" pitchFamily="34" charset="-122"/>
                 <a:cs typeface="Calibri" pitchFamily="34" charset="-120"/>
               </a:rPr>
-              <a:t>, but his </a:t>
+              <a:t> deeds, yet even a </a:t>
             </a:r>
             <a:pPr algn="l" indent="0" marL="0">
               <a:buNone/>
@@ -16834,7 +16834,7 @@
                 <a:ea typeface="Calibri" pitchFamily="34" charset="-122"/>
                 <a:cs typeface="Calibri" pitchFamily="34" charset="-120"/>
               </a:rPr>
-              <a:t>badness</a:t>
+              <a:t>baddie</a:t>
             </a:r>
             <a:pPr algn="l" indent="0" marL="0">
               <a:buNone/>
@@ -16848,7 +16848,7 @@
                 <a:ea typeface="Calibri" pitchFamily="34" charset="-122"/>
                 <a:cs typeface="Calibri" pitchFamily="34" charset="-120"/>
               </a:rPr>
-              <a:t> was eventually punished by the hero.</a:t>
+              <a:t> can learn to change.</a:t>
             </a:r>
             <a:endParaRPr lang="en-US" sz="1800" dirty="0"/>
           </a:p>
@@ -17131,7 +17131,7 @@
                 <a:ea typeface="Trebuchet MS" pitchFamily="34" charset="-122"/>
                 <a:cs typeface="Trebuchet MS" pitchFamily="34" charset="-120"/>
               </a:rPr>
-              <a:t>badly</a:t>
+              <a:t>baddest</a:t>
             </a:r>
             <a:endParaRPr lang="en-US" sz="1400" dirty="0"/>
           </a:p>
@@ -17259,7 +17259,7 @@
                 <a:ea typeface="Trebuchet MS" pitchFamily="34" charset="-122"/>
                 <a:cs typeface="Trebuchet MS" pitchFamily="34" charset="-120"/>
               </a:rPr>
-              <a:t>badness</a:t>
+              <a:t>baddie</a:t>
             </a:r>
             <a:endParaRPr lang="en-US" sz="1400" dirty="0"/>
           </a:p>
@@ -17590,7 +17590,7 @@
                 <a:ea typeface="Calibri" pitchFamily="34" charset="-122"/>
                 <a:cs typeface="Calibri" pitchFamily="34" charset="-120"/>
               </a:rPr>
-              <a:t>Word Labs  •  wordlabs.app  •  Root: 'bad' = not good, harmful, wrong</a:t>
+              <a:t>Word Labs  •  wordlabs.app  •  Root: 'bad' = not good, harmful, unpleasant</a:t>
             </a:r>
             <a:endParaRPr lang="en-US" sz="800" dirty="0"/>
           </a:p>
@@ -18417,7 +18417,7 @@
                 <a:ea typeface="Calibri" pitchFamily="34" charset="-122"/>
                 <a:cs typeface="Calibri" pitchFamily="34" charset="-120"/>
               </a:rPr>
-              <a:t>Word Labs  •  wordlabs.app  •  Root: 'bad' = not good, harmful, wrong</a:t>
+              <a:t>Word Labs  •  wordlabs.app  •  Root: 'bad' = not good, harmful, unpleasant</a:t>
             </a:r>
             <a:endParaRPr lang="en-US" sz="800" dirty="0"/>
           </a:p>
@@ -19402,7 +19402,7 @@
                 <a:ea typeface="Calibri" pitchFamily="34" charset="-122"/>
                 <a:cs typeface="Calibri" pitchFamily="34" charset="-120"/>
               </a:rPr>
-              <a:t>Word Labs  •  wordlabs.app  •  Root: 'bad' = not good, harmful, wrong</a:t>
+              <a:t>Word Labs  •  wordlabs.app  •  Root: 'bad' = not good, harmful, unpleasant</a:t>
             </a:r>
             <a:endParaRPr lang="en-US" sz="800" dirty="0"/>
           </a:p>
@@ -20519,7 +20519,7 @@
                 <a:ea typeface="Calibri" pitchFamily="34" charset="-122"/>
                 <a:cs typeface="Calibri" pitchFamily="34" charset="-120"/>
               </a:rPr>
-              <a:t>Word Labs  •  wordlabs.app  •  Root: 'bad' = not good, harmful, wrong</a:t>
+              <a:t>Word Labs  •  wordlabs.app  •  Root: 'bad' = not good, harmful, unpleasant</a:t>
             </a:r>
             <a:endParaRPr lang="en-US" sz="800" dirty="0"/>
           </a:p>
@@ -21993,7 +21993,7 @@
                 <a:ea typeface="Calibri" pitchFamily="34" charset="-122"/>
                 <a:cs typeface="Calibri" pitchFamily="34" charset="-120"/>
               </a:rPr>
-              <a:t>Word Labs  •  wordlabs.app  •  Root: 'bad' = not good, harmful, wrong</a:t>
+              <a:t>Word Labs  •  wordlabs.app  •  Root: 'bad' = not good, harmful, unpleasant</a:t>
             </a:r>
             <a:endParaRPr lang="en-US" sz="800" dirty="0"/>
           </a:p>
@@ -22132,7 +22132,7 @@
                 <a:ea typeface="Trebuchet MS" pitchFamily="34" charset="-122"/>
                 <a:cs typeface="Trebuchet MS" pitchFamily="34" charset="-120"/>
               </a:rPr>
-              <a:t>badly</a:t>
+              <a:t>baddest</a:t>
             </a:r>
             <a:endParaRPr lang="en-US" sz="2800" dirty="0"/>
           </a:p>
@@ -22820,7 +22820,7 @@
                 <a:ea typeface="Calibri" pitchFamily="34" charset="-122"/>
                 <a:cs typeface="Calibri" pitchFamily="34" charset="-120"/>
               </a:rPr>
-              <a:t>Word Labs  •  wordlabs.app  •  Root: 'bad' = not good, harmful, wrong</a:t>
+              <a:t>Word Labs  •  wordlabs.app  •  Root: 'bad' = not good, harmful, unpleasant</a:t>
             </a:r>
             <a:endParaRPr lang="en-US" sz="800" dirty="0"/>
           </a:p>
@@ -22959,7 +22959,7 @@
                 <a:ea typeface="Trebuchet MS" pitchFamily="34" charset="-122"/>
                 <a:cs typeface="Trebuchet MS" pitchFamily="34" charset="-120"/>
               </a:rPr>
-              <a:t>badly</a:t>
+              <a:t>baddest</a:t>
             </a:r>
             <a:endParaRPr lang="en-US" sz="2800" dirty="0"/>
           </a:p>
@@ -23210,7 +23210,7 @@
                 <a:ea typeface="Trebuchet MS" pitchFamily="34" charset="-122"/>
                 <a:cs typeface="Trebuchet MS" pitchFamily="34" charset="-120"/>
               </a:rPr>
-              <a:t>ly</a:t>
+              <a:t>est</a:t>
             </a:r>
             <a:endParaRPr lang="en-US" sz="1300" dirty="0"/>
           </a:p>
@@ -23249,7 +23249,7 @@
                 <a:ea typeface="Calibri" pitchFamily="34" charset="-122"/>
                 <a:cs typeface="Calibri" pitchFamily="34" charset="-120"/>
               </a:rPr>
-              <a:t>in a way that is</a:t>
+              <a:t>the most</a:t>
             </a:r>
             <a:endParaRPr lang="en-US" sz="850" dirty="0"/>
           </a:p>
@@ -23805,7 +23805,7 @@
                 <a:ea typeface="Calibri" pitchFamily="34" charset="-122"/>
                 <a:cs typeface="Calibri" pitchFamily="34" charset="-120"/>
               </a:rPr>
-              <a:t>Word Labs  •  wordlabs.app  •  Root: 'bad' = not good, harmful, wrong</a:t>
+              <a:t>Word Labs  •  wordlabs.app  •  Root: 'bad' = not good, harmful, unpleasant</a:t>
             </a:r>
             <a:endParaRPr lang="en-US" sz="800" dirty="0"/>
           </a:p>
@@ -23878,7 +23878,7 @@
                 <a:ea typeface="Trebuchet MS" pitchFamily="34" charset="-122"/>
                 <a:cs typeface="Trebuchet MS" pitchFamily="34" charset="-120"/>
               </a:rPr>
-              <a:t>We are learning that the root 'bad' means 'not good, harmful, wrong'.</a:t>
+              <a:t>We are learning that the root 'bad' means 'not good, harmful, unpleasant'.</a:t>
             </a:r>
             <a:endParaRPr lang="en-US" sz="2000" dirty="0"/>
           </a:p>
@@ -24524,7 +24524,7 @@
                 <a:ea typeface="Calibri" pitchFamily="34" charset="-122"/>
                 <a:cs typeface="Calibri" pitchFamily="34" charset="-120"/>
               </a:rPr>
-              <a:t>Word Labs  •  wordlabs.app  •  Root: 'bad' = not good, harmful, wrong</a:t>
+              <a:t>Word Labs  •  wordlabs.app  •  Root: 'bad' = not good, harmful, unpleasant</a:t>
             </a:r>
             <a:endParaRPr lang="en-US" sz="800" dirty="0"/>
           </a:p>
@@ -24663,7 +24663,7 @@
                 <a:ea typeface="Trebuchet MS" pitchFamily="34" charset="-122"/>
                 <a:cs typeface="Trebuchet MS" pitchFamily="34" charset="-120"/>
               </a:rPr>
-              <a:t>badly</a:t>
+              <a:t>baddest</a:t>
             </a:r>
             <a:endParaRPr lang="en-US" sz="2800" dirty="0"/>
           </a:p>
@@ -24914,7 +24914,7 @@
                 <a:ea typeface="Trebuchet MS" pitchFamily="34" charset="-122"/>
                 <a:cs typeface="Trebuchet MS" pitchFamily="34" charset="-120"/>
               </a:rPr>
-              <a:t>ly</a:t>
+              <a:t>est</a:t>
             </a:r>
             <a:endParaRPr lang="en-US" sz="1300" dirty="0"/>
           </a:p>
@@ -24953,7 +24953,7 @@
                 <a:ea typeface="Calibri" pitchFamily="34" charset="-122"/>
                 <a:cs typeface="Calibri" pitchFamily="34" charset="-120"/>
               </a:rPr>
-              <a:t>in a way that is</a:t>
+              <a:t>the most</a:t>
             </a:r>
             <a:endParaRPr lang="en-US" sz="850" dirty="0"/>
           </a:p>
@@ -25217,7 +25217,7 @@
                 <a:ea typeface="Trebuchet MS" pitchFamily="34" charset="-122"/>
                 <a:cs typeface="Trebuchet MS" pitchFamily="34" charset="-120"/>
               </a:rPr>
-              <a:t>ly</a:t>
+              <a:t>dest</a:t>
             </a:r>
             <a:endParaRPr lang="en-US" sz="1400" dirty="0"/>
           </a:p>
@@ -25641,7 +25641,7 @@
                 <a:ea typeface="Calibri" pitchFamily="34" charset="-122"/>
                 <a:cs typeface="Calibri" pitchFamily="34" charset="-120"/>
               </a:rPr>
-              <a:t>Word Labs  •  wordlabs.app  •  Root: 'bad' = not good, harmful, wrong</a:t>
+              <a:t>Word Labs  •  wordlabs.app  •  Root: 'bad' = not good, harmful, unpleasant</a:t>
             </a:r>
             <a:endParaRPr lang="en-US" sz="800" dirty="0"/>
           </a:p>
@@ -25780,7 +25780,7 @@
                 <a:ea typeface="Trebuchet MS" pitchFamily="34" charset="-122"/>
                 <a:cs typeface="Trebuchet MS" pitchFamily="34" charset="-120"/>
               </a:rPr>
-              <a:t>badly</a:t>
+              <a:t>baddest</a:t>
             </a:r>
             <a:endParaRPr lang="en-US" sz="2800" dirty="0"/>
           </a:p>
@@ -26031,7 +26031,7 @@
                 <a:ea typeface="Trebuchet MS" pitchFamily="34" charset="-122"/>
                 <a:cs typeface="Trebuchet MS" pitchFamily="34" charset="-120"/>
               </a:rPr>
-              <a:t>ly</a:t>
+              <a:t>est</a:t>
             </a:r>
             <a:endParaRPr lang="en-US" sz="1300" dirty="0"/>
           </a:p>
@@ -26070,7 +26070,7 @@
                 <a:ea typeface="Calibri" pitchFamily="34" charset="-122"/>
                 <a:cs typeface="Calibri" pitchFamily="34" charset="-120"/>
               </a:rPr>
-              <a:t>in a way that is</a:t>
+              <a:t>the most</a:t>
             </a:r>
             <a:endParaRPr lang="en-US" sz="850" dirty="0"/>
           </a:p>
@@ -26334,7 +26334,7 @@
                 <a:ea typeface="Trebuchet MS" pitchFamily="34" charset="-122"/>
                 <a:cs typeface="Trebuchet MS" pitchFamily="34" charset="-120"/>
               </a:rPr>
-              <a:t>ly</a:t>
+              <a:t>dest</a:t>
             </a:r>
             <a:endParaRPr lang="en-US" sz="1400" dirty="0"/>
           </a:p>
@@ -26441,7 +26441,7 @@
         </p:nvSpPr>
         <p:spPr>
           <a:xfrm>
-            <a:off x="2427732" y="4169664"/>
+            <a:off x="2254649" y="4169664"/>
             <a:ext cx="685800" cy="475488"/>
           </a:xfrm>
           <a:prstGeom prst="rect">
@@ -26468,7 +26468,7 @@
         </p:nvSpPr>
         <p:spPr>
           <a:xfrm>
-            <a:off x="2427732" y="4169664"/>
+            <a:off x="2254649" y="4169664"/>
             <a:ext cx="685800" cy="475488"/>
           </a:xfrm>
           <a:prstGeom prst="rect">
@@ -26507,7 +26507,7 @@
         </p:nvSpPr>
         <p:spPr>
           <a:xfrm>
-            <a:off x="3639312" y="4169664"/>
+            <a:off x="3293146" y="4169664"/>
             <a:ext cx="685800" cy="475488"/>
           </a:xfrm>
           <a:prstGeom prst="rect">
@@ -26534,7 +26534,7 @@
         </p:nvSpPr>
         <p:spPr>
           <a:xfrm>
-            <a:off x="3639312" y="4169664"/>
+            <a:off x="3293146" y="4169664"/>
             <a:ext cx="685800" cy="475488"/>
           </a:xfrm>
           <a:prstGeom prst="rect">
@@ -26573,7 +26573,7 @@
         </p:nvSpPr>
         <p:spPr>
           <a:xfrm>
-            <a:off x="4850892" y="4169664"/>
+            <a:off x="4331643" y="4169664"/>
             <a:ext cx="685800" cy="475488"/>
           </a:xfrm>
           <a:prstGeom prst="rect">
@@ -26600,7 +26600,7 @@
         </p:nvSpPr>
         <p:spPr>
           <a:xfrm>
-            <a:off x="4850892" y="4169664"/>
+            <a:off x="4331643" y="4169664"/>
             <a:ext cx="685800" cy="475488"/>
           </a:xfrm>
           <a:prstGeom prst="rect">
@@ -26625,7 +26625,7 @@
                 <a:ea typeface="Trebuchet MS" pitchFamily="34" charset="-122"/>
                 <a:cs typeface="Trebuchet MS" pitchFamily="34" charset="-120"/>
               </a:rPr>
-              <a:t>d</a:t>
+              <a:t>dd</a:t>
             </a:r>
             <a:endParaRPr lang="en-US" sz="900" dirty="0"/>
           </a:p>
@@ -26639,7 +26639,7 @@
         </p:nvSpPr>
         <p:spPr>
           <a:xfrm>
-            <a:off x="6062472" y="4169664"/>
+            <a:off x="5370141" y="4169664"/>
             <a:ext cx="685800" cy="475488"/>
           </a:xfrm>
           <a:prstGeom prst="rect">
@@ -26666,7 +26666,7 @@
         </p:nvSpPr>
         <p:spPr>
           <a:xfrm>
-            <a:off x="6062472" y="4169664"/>
+            <a:off x="5370141" y="4169664"/>
             <a:ext cx="685800" cy="475488"/>
           </a:xfrm>
           <a:prstGeom prst="rect">
@@ -26691,7 +26691,7 @@
                 <a:ea typeface="Trebuchet MS" pitchFamily="34" charset="-122"/>
                 <a:cs typeface="Trebuchet MS" pitchFamily="34" charset="-120"/>
               </a:rPr>
-              <a:t>l</a:t>
+              <a:t>e</a:t>
             </a:r>
             <a:endParaRPr lang="en-US" sz="900" dirty="0"/>
           </a:p>
@@ -26705,7 +26705,7 @@
         </p:nvSpPr>
         <p:spPr>
           <a:xfrm>
-            <a:off x="7274052" y="4169664"/>
+            <a:off x="6408638" y="4169664"/>
             <a:ext cx="685800" cy="475488"/>
           </a:xfrm>
           <a:prstGeom prst="rect">
@@ -26732,7 +26732,7 @@
         </p:nvSpPr>
         <p:spPr>
           <a:xfrm>
-            <a:off x="7274052" y="4169664"/>
+            <a:off x="6408638" y="4169664"/>
             <a:ext cx="685800" cy="475488"/>
           </a:xfrm>
           <a:prstGeom prst="rect">
@@ -26757,7 +26757,73 @@
                 <a:ea typeface="Trebuchet MS" pitchFamily="34" charset="-122"/>
                 <a:cs typeface="Trebuchet MS" pitchFamily="34" charset="-120"/>
               </a:rPr>
-              <a:t>y</a:t>
+              <a:t>s</a:t>
+            </a:r>
+            <a:endParaRPr lang="en-US" sz="900" dirty="0"/>
+          </a:p>
+        </p:txBody>
+      </p:sp>
+      <p:sp>
+        <p:nvSpPr>
+          <p:cNvPr id="43" name="Shape 41"/>
+          <p:cNvSpPr/>
+          <p:nvPr/>
+        </p:nvSpPr>
+        <p:spPr>
+          <a:xfrm>
+            <a:off x="7447135" y="4169664"/>
+            <a:ext cx="685800" cy="475488"/>
+          </a:xfrm>
+          <a:prstGeom prst="rect">
+            <a:avLst>
+              <a:gd name="adj" fmla="val 7692"/>
+            </a:avLst>
+          </a:prstGeom>
+          <a:solidFill>
+            <a:srgbClr val="FFFFFF"/>
+          </a:solidFill>
+          <a:ln w="12700">
+            <a:solidFill>
+              <a:srgbClr val="DB2777"/>
+            </a:solidFill>
+            <a:prstDash val="solid"/>
+          </a:ln>
+        </p:spPr>
+      </p:sp>
+      <p:sp>
+        <p:nvSpPr>
+          <p:cNvPr id="44" name="Text 42"/>
+          <p:cNvSpPr/>
+          <p:nvPr/>
+        </p:nvSpPr>
+        <p:spPr>
+          <a:xfrm>
+            <a:off x="7447135" y="4169664"/>
+            <a:ext cx="685800" cy="475488"/>
+          </a:xfrm>
+          <a:prstGeom prst="rect">
+            <a:avLst/>
+          </a:prstGeom>
+          <a:noFill/>
+          <a:ln/>
+        </p:spPr>
+        <p:txBody>
+          <a:bodyPr wrap="square" lIns="0" tIns="0" rIns="0" bIns="0" rtlCol="0" anchor="ctr"/>
+          <a:lstStyle/>
+          <a:p>
+            <a:pPr algn="ctr" indent="0" marL="0">
+              <a:buNone/>
+            </a:pPr>
+            <a:r>
+              <a:rPr lang="en-US" sz="900" b="1" dirty="0">
+                <a:solidFill>
+                  <a:srgbClr val="9D174D"/>
+                </a:solidFill>
+                <a:latin typeface="Trebuchet MS" pitchFamily="34" charset="0"/>
+                <a:ea typeface="Trebuchet MS" pitchFamily="34" charset="-122"/>
+                <a:cs typeface="Trebuchet MS" pitchFamily="34" charset="-120"/>
+              </a:rPr>
+              <a:t>t</a:t>
             </a:r>
             <a:endParaRPr lang="en-US" sz="900" dirty="0"/>
           </a:p>
@@ -27049,7 +27115,7 @@
                 <a:ea typeface="Calibri" pitchFamily="34" charset="-122"/>
                 <a:cs typeface="Calibri" pitchFamily="34" charset="-120"/>
               </a:rPr>
-              <a:t>Word Labs  •  wordlabs.app  •  Root: 'bad' = not good, harmful, wrong</a:t>
+              <a:t>Word Labs  •  wordlabs.app  •  Root: 'bad' = not good, harmful, unpleasant</a:t>
             </a:r>
             <a:endParaRPr lang="en-US" sz="800" dirty="0"/>
           </a:p>
@@ -27188,7 +27254,7 @@
                 <a:ea typeface="Trebuchet MS" pitchFamily="34" charset="-122"/>
                 <a:cs typeface="Trebuchet MS" pitchFamily="34" charset="-120"/>
               </a:rPr>
-              <a:t>badness</a:t>
+              <a:t>baddie</a:t>
             </a:r>
             <a:endParaRPr lang="en-US" sz="2800" dirty="0"/>
           </a:p>
@@ -27876,7 +27942,7 @@
                 <a:ea typeface="Calibri" pitchFamily="34" charset="-122"/>
                 <a:cs typeface="Calibri" pitchFamily="34" charset="-120"/>
               </a:rPr>
-              <a:t>Word Labs  •  wordlabs.app  •  Root: 'bad' = not good, harmful, wrong</a:t>
+              <a:t>Word Labs  •  wordlabs.app  •  Root: 'bad' = not good, harmful, unpleasant</a:t>
             </a:r>
             <a:endParaRPr lang="en-US" sz="800" dirty="0"/>
           </a:p>
@@ -28015,7 +28081,7 @@
                 <a:ea typeface="Trebuchet MS" pitchFamily="34" charset="-122"/>
                 <a:cs typeface="Trebuchet MS" pitchFamily="34" charset="-120"/>
               </a:rPr>
-              <a:t>badness</a:t>
+              <a:t>baddie</a:t>
             </a:r>
             <a:endParaRPr lang="en-US" sz="2800" dirty="0"/>
           </a:p>
@@ -28216,11 +28282,11 @@
             </a:avLst>
           </a:prstGeom>
           <a:solidFill>
-            <a:srgbClr val="FCE7F3"/>
+            <a:srgbClr val="DDD6FE"/>
           </a:solidFill>
           <a:ln w="19050">
             <a:solidFill>
-              <a:srgbClr val="DB2777"/>
+              <a:srgbClr val="7C3AED"/>
             </a:solidFill>
             <a:prstDash val="solid"/>
           </a:ln>
@@ -28260,13 +28326,13 @@
             <a:r>
               <a:rPr lang="en-US" sz="1300" b="1" dirty="0">
                 <a:solidFill>
-                  <a:srgbClr val="9D174D"/>
+                  <a:srgbClr val="4C1D95"/>
                 </a:solidFill>
                 <a:latin typeface="Trebuchet MS" pitchFamily="34" charset="0"/>
                 <a:ea typeface="Trebuchet MS" pitchFamily="34" charset="-122"/>
                 <a:cs typeface="Trebuchet MS" pitchFamily="34" charset="-120"/>
               </a:rPr>
-              <a:t>ness</a:t>
+              <a:t>ie</a:t>
             </a:r>
             <a:endParaRPr lang="en-US" sz="1300" dirty="0"/>
           </a:p>
@@ -28305,7 +28371,7 @@
                 <a:ea typeface="Calibri" pitchFamily="34" charset="-122"/>
                 <a:cs typeface="Calibri" pitchFamily="34" charset="-120"/>
               </a:rPr>
-              <a:t>the state or quality of</a:t>
+              <a:t>person associated with</a:t>
             </a:r>
             <a:endParaRPr lang="en-US" sz="850" dirty="0"/>
           </a:p>
@@ -28861,7 +28927,7 @@
                 <a:ea typeface="Calibri" pitchFamily="34" charset="-122"/>
                 <a:cs typeface="Calibri" pitchFamily="34" charset="-120"/>
               </a:rPr>
-              <a:t>Word Labs  •  wordlabs.app  •  Root: 'bad' = not good, harmful, wrong</a:t>
+              <a:t>Word Labs  •  wordlabs.app  •  Root: 'bad' = not good, harmful, unpleasant</a:t>
             </a:r>
             <a:endParaRPr lang="en-US" sz="800" dirty="0"/>
           </a:p>
@@ -29000,7 +29066,7 @@
                 <a:ea typeface="Trebuchet MS" pitchFamily="34" charset="-122"/>
                 <a:cs typeface="Trebuchet MS" pitchFamily="34" charset="-120"/>
               </a:rPr>
-              <a:t>badness</a:t>
+              <a:t>baddie</a:t>
             </a:r>
             <a:endParaRPr lang="en-US" sz="2800" dirty="0"/>
           </a:p>
@@ -29201,11 +29267,11 @@
             </a:avLst>
           </a:prstGeom>
           <a:solidFill>
-            <a:srgbClr val="FCE7F3"/>
+            <a:srgbClr val="DDD6FE"/>
           </a:solidFill>
           <a:ln w="19050">
             <a:solidFill>
-              <a:srgbClr val="DB2777"/>
+              <a:srgbClr val="7C3AED"/>
             </a:solidFill>
             <a:prstDash val="solid"/>
           </a:ln>
@@ -29245,13 +29311,13 @@
             <a:r>
               <a:rPr lang="en-US" sz="1300" b="1" dirty="0">
                 <a:solidFill>
-                  <a:srgbClr val="9D174D"/>
+                  <a:srgbClr val="4C1D95"/>
                 </a:solidFill>
                 <a:latin typeface="Trebuchet MS" pitchFamily="34" charset="0"/>
                 <a:ea typeface="Trebuchet MS" pitchFamily="34" charset="-122"/>
                 <a:cs typeface="Trebuchet MS" pitchFamily="34" charset="-120"/>
               </a:rPr>
-              <a:t>ness</a:t>
+              <a:t>ie</a:t>
             </a:r>
             <a:endParaRPr lang="en-US" sz="1300" dirty="0"/>
           </a:p>
@@ -29290,7 +29356,7 @@
                 <a:ea typeface="Calibri" pitchFamily="34" charset="-122"/>
                 <a:cs typeface="Calibri" pitchFamily="34" charset="-120"/>
               </a:rPr>
-              <a:t>the state or quality of</a:t>
+              <a:t>person associated with</a:t>
             </a:r>
             <a:endParaRPr lang="en-US" sz="850" dirty="0"/>
           </a:p>
@@ -29554,7 +29620,7 @@
                 <a:ea typeface="Trebuchet MS" pitchFamily="34" charset="-122"/>
                 <a:cs typeface="Trebuchet MS" pitchFamily="34" charset="-120"/>
               </a:rPr>
-              <a:t>ness</a:t>
+              <a:t>die</a:t>
             </a:r>
             <a:endParaRPr lang="en-US" sz="1400" dirty="0"/>
           </a:p>
@@ -29978,7 +30044,7 @@
                 <a:ea typeface="Calibri" pitchFamily="34" charset="-122"/>
                 <a:cs typeface="Calibri" pitchFamily="34" charset="-120"/>
               </a:rPr>
-              <a:t>Word Labs  •  wordlabs.app  •  Root: 'bad' = not good, harmful, wrong</a:t>
+              <a:t>Word Labs  •  wordlabs.app  •  Root: 'bad' = not good, harmful, unpleasant</a:t>
             </a:r>
             <a:endParaRPr lang="en-US" sz="800" dirty="0"/>
           </a:p>
@@ -30117,7 +30183,7 @@
                 <a:ea typeface="Trebuchet MS" pitchFamily="34" charset="-122"/>
                 <a:cs typeface="Trebuchet MS" pitchFamily="34" charset="-120"/>
               </a:rPr>
-              <a:t>badness</a:t>
+              <a:t>baddie</a:t>
             </a:r>
             <a:endParaRPr lang="en-US" sz="2800" dirty="0"/>
           </a:p>
@@ -30318,11 +30384,11 @@
             </a:avLst>
           </a:prstGeom>
           <a:solidFill>
-            <a:srgbClr val="FCE7F3"/>
+            <a:srgbClr val="DDD6FE"/>
           </a:solidFill>
           <a:ln w="19050">
             <a:solidFill>
-              <a:srgbClr val="DB2777"/>
+              <a:srgbClr val="7C3AED"/>
             </a:solidFill>
             <a:prstDash val="solid"/>
           </a:ln>
@@ -30362,13 +30428,13 @@
             <a:r>
               <a:rPr lang="en-US" sz="1300" b="1" dirty="0">
                 <a:solidFill>
-                  <a:srgbClr val="9D174D"/>
+                  <a:srgbClr val="4C1D95"/>
                 </a:solidFill>
                 <a:latin typeface="Trebuchet MS" pitchFamily="34" charset="0"/>
                 <a:ea typeface="Trebuchet MS" pitchFamily="34" charset="-122"/>
                 <a:cs typeface="Trebuchet MS" pitchFamily="34" charset="-120"/>
               </a:rPr>
-              <a:t>ness</a:t>
+              <a:t>ie</a:t>
             </a:r>
             <a:endParaRPr lang="en-US" sz="1300" dirty="0"/>
           </a:p>
@@ -30407,7 +30473,7 @@
                 <a:ea typeface="Calibri" pitchFamily="34" charset="-122"/>
                 <a:cs typeface="Calibri" pitchFamily="34" charset="-120"/>
               </a:rPr>
-              <a:t>the state or quality of</a:t>
+              <a:t>person associated with</a:t>
             </a:r>
             <a:endParaRPr lang="en-US" sz="850" dirty="0"/>
           </a:p>
@@ -30671,7 +30737,7 @@
                 <a:ea typeface="Trebuchet MS" pitchFamily="34" charset="-122"/>
                 <a:cs typeface="Trebuchet MS" pitchFamily="34" charset="-120"/>
               </a:rPr>
-              <a:t>ness</a:t>
+              <a:t>die</a:t>
             </a:r>
             <a:endParaRPr lang="en-US" sz="1400" dirty="0"/>
           </a:p>
@@ -30778,7 +30844,7 @@
         </p:nvSpPr>
         <p:spPr>
           <a:xfrm>
-            <a:off x="2254649" y="4169664"/>
+            <a:off x="2670048" y="4169664"/>
             <a:ext cx="685800" cy="475488"/>
           </a:xfrm>
           <a:prstGeom prst="rect">
@@ -30805,7 +30871,7 @@
         </p:nvSpPr>
         <p:spPr>
           <a:xfrm>
-            <a:off x="2254649" y="4169664"/>
+            <a:off x="2670048" y="4169664"/>
             <a:ext cx="685800" cy="475488"/>
           </a:xfrm>
           <a:prstGeom prst="rect">
@@ -30844,7 +30910,7 @@
         </p:nvSpPr>
         <p:spPr>
           <a:xfrm>
-            <a:off x="3293146" y="4169664"/>
+            <a:off x="4123944" y="4169664"/>
             <a:ext cx="685800" cy="475488"/>
           </a:xfrm>
           <a:prstGeom prst="rect">
@@ -30871,7 +30937,7 @@
         </p:nvSpPr>
         <p:spPr>
           <a:xfrm>
-            <a:off x="3293146" y="4169664"/>
+            <a:off x="4123944" y="4169664"/>
             <a:ext cx="685800" cy="475488"/>
           </a:xfrm>
           <a:prstGeom prst="rect">
@@ -30910,7 +30976,7 @@
         </p:nvSpPr>
         <p:spPr>
           <a:xfrm>
-            <a:off x="4331643" y="4169664"/>
+            <a:off x="5577840" y="4169664"/>
             <a:ext cx="685800" cy="475488"/>
           </a:xfrm>
           <a:prstGeom prst="rect">
@@ -30937,7 +31003,7 @@
         </p:nvSpPr>
         <p:spPr>
           <a:xfrm>
-            <a:off x="4331643" y="4169664"/>
+            <a:off x="5577840" y="4169664"/>
             <a:ext cx="685800" cy="475488"/>
           </a:xfrm>
           <a:prstGeom prst="rect">
@@ -30962,7 +31028,7 @@
                 <a:ea typeface="Trebuchet MS" pitchFamily="34" charset="-122"/>
                 <a:cs typeface="Trebuchet MS" pitchFamily="34" charset="-120"/>
               </a:rPr>
-              <a:t>d</a:t>
+              <a:t>dd</a:t>
             </a:r>
             <a:endParaRPr lang="en-US" sz="900" dirty="0"/>
           </a:p>
@@ -30976,7 +31042,7 @@
         </p:nvSpPr>
         <p:spPr>
           <a:xfrm>
-            <a:off x="5370141" y="4169664"/>
+            <a:off x="7031736" y="4169664"/>
             <a:ext cx="685800" cy="475488"/>
           </a:xfrm>
           <a:prstGeom prst="rect">
@@ -31003,7 +31069,7 @@
         </p:nvSpPr>
         <p:spPr>
           <a:xfrm>
-            <a:off x="5370141" y="4169664"/>
+            <a:off x="7031736" y="4169664"/>
             <a:ext cx="685800" cy="475488"/>
           </a:xfrm>
           <a:prstGeom prst="rect">
@@ -31028,139 +31094,7 @@
                 <a:ea typeface="Trebuchet MS" pitchFamily="34" charset="-122"/>
                 <a:cs typeface="Trebuchet MS" pitchFamily="34" charset="-120"/>
               </a:rPr>
-              <a:t>n</a:t>
-            </a:r>
-            <a:endParaRPr lang="en-US" sz="900" dirty="0"/>
-          </a:p>
-        </p:txBody>
-      </p:sp>
-      <p:sp>
-        <p:nvSpPr>
-          <p:cNvPr id="41" name="Shape 39"/>
-          <p:cNvSpPr/>
-          <p:nvPr/>
-        </p:nvSpPr>
-        <p:spPr>
-          <a:xfrm>
-            <a:off x="6408638" y="4169664"/>
-            <a:ext cx="685800" cy="475488"/>
-          </a:xfrm>
-          <a:prstGeom prst="rect">
-            <a:avLst>
-              <a:gd name="adj" fmla="val 7692"/>
-            </a:avLst>
-          </a:prstGeom>
-          <a:solidFill>
-            <a:srgbClr val="FFFFFF"/>
-          </a:solidFill>
-          <a:ln w="12700">
-            <a:solidFill>
-              <a:srgbClr val="DB2777"/>
-            </a:solidFill>
-            <a:prstDash val="solid"/>
-          </a:ln>
-        </p:spPr>
-      </p:sp>
-      <p:sp>
-        <p:nvSpPr>
-          <p:cNvPr id="42" name="Text 40"/>
-          <p:cNvSpPr/>
-          <p:nvPr/>
-        </p:nvSpPr>
-        <p:spPr>
-          <a:xfrm>
-            <a:off x="6408638" y="4169664"/>
-            <a:ext cx="685800" cy="475488"/>
-          </a:xfrm>
-          <a:prstGeom prst="rect">
-            <a:avLst/>
-          </a:prstGeom>
-          <a:noFill/>
-          <a:ln/>
-        </p:spPr>
-        <p:txBody>
-          <a:bodyPr wrap="square" lIns="0" tIns="0" rIns="0" bIns="0" rtlCol="0" anchor="ctr"/>
-          <a:lstStyle/>
-          <a:p>
-            <a:pPr algn="ctr" indent="0" marL="0">
-              <a:buNone/>
-            </a:pPr>
-            <a:r>
-              <a:rPr lang="en-US" sz="900" b="1" dirty="0">
-                <a:solidFill>
-                  <a:srgbClr val="9D174D"/>
-                </a:solidFill>
-                <a:latin typeface="Trebuchet MS" pitchFamily="34" charset="0"/>
-                <a:ea typeface="Trebuchet MS" pitchFamily="34" charset="-122"/>
-                <a:cs typeface="Trebuchet MS" pitchFamily="34" charset="-120"/>
-              </a:rPr>
-              <a:t>e</a:t>
-            </a:r>
-            <a:endParaRPr lang="en-US" sz="900" dirty="0"/>
-          </a:p>
-        </p:txBody>
-      </p:sp>
-      <p:sp>
-        <p:nvSpPr>
-          <p:cNvPr id="43" name="Shape 41"/>
-          <p:cNvSpPr/>
-          <p:nvPr/>
-        </p:nvSpPr>
-        <p:spPr>
-          <a:xfrm>
-            <a:off x="7447135" y="4169664"/>
-            <a:ext cx="685800" cy="475488"/>
-          </a:xfrm>
-          <a:prstGeom prst="rect">
-            <a:avLst>
-              <a:gd name="adj" fmla="val 7692"/>
-            </a:avLst>
-          </a:prstGeom>
-          <a:solidFill>
-            <a:srgbClr val="FFFFFF"/>
-          </a:solidFill>
-          <a:ln w="12700">
-            <a:solidFill>
-              <a:srgbClr val="DB2777"/>
-            </a:solidFill>
-            <a:prstDash val="solid"/>
-          </a:ln>
-        </p:spPr>
-      </p:sp>
-      <p:sp>
-        <p:nvSpPr>
-          <p:cNvPr id="44" name="Text 42"/>
-          <p:cNvSpPr/>
-          <p:nvPr/>
-        </p:nvSpPr>
-        <p:spPr>
-          <a:xfrm>
-            <a:off x="7447135" y="4169664"/>
-            <a:ext cx="685800" cy="475488"/>
-          </a:xfrm>
-          <a:prstGeom prst="rect">
-            <a:avLst/>
-          </a:prstGeom>
-          <a:noFill/>
-          <a:ln/>
-        </p:spPr>
-        <p:txBody>
-          <a:bodyPr wrap="square" lIns="0" tIns="0" rIns="0" bIns="0" rtlCol="0" anchor="ctr"/>
-          <a:lstStyle/>
-          <a:p>
-            <a:pPr algn="ctr" indent="0" marL="0">
-              <a:buNone/>
-            </a:pPr>
-            <a:r>
-              <a:rPr lang="en-US" sz="900" b="1" dirty="0">
-                <a:solidFill>
-                  <a:srgbClr val="9D174D"/>
-                </a:solidFill>
-                <a:latin typeface="Trebuchet MS" pitchFamily="34" charset="0"/>
-                <a:ea typeface="Trebuchet MS" pitchFamily="34" charset="-122"/>
-                <a:cs typeface="Trebuchet MS" pitchFamily="34" charset="-120"/>
-              </a:rPr>
-              <a:t>ss</a:t>
+              <a:t>ie</a:t>
             </a:r>
             <a:endParaRPr lang="en-US" sz="900" dirty="0"/>
           </a:p>
@@ -31452,7 +31386,7 @@
                 <a:ea typeface="Calibri" pitchFamily="34" charset="-122"/>
                 <a:cs typeface="Calibri" pitchFamily="34" charset="-120"/>
               </a:rPr>
-              <a:t>Word Labs  •  wordlabs.app  •  Root: 'bad' = not good, harmful, wrong</a:t>
+              <a:t>Word Labs  •  wordlabs.app  •  Root: 'bad' = not good, harmful, unpleasant</a:t>
             </a:r>
             <a:endParaRPr lang="en-US" sz="800" dirty="0"/>
           </a:p>
@@ -32621,7 +32555,7 @@
                 <a:ea typeface="Calibri" pitchFamily="34" charset="-122"/>
                 <a:cs typeface="Calibri" pitchFamily="34" charset="-120"/>
               </a:rPr>
-              <a:t>Word Labs  •  wordlabs.app  •  Root: 'bad' = not good, harmful, wrong</a:t>
+              <a:t>Word Labs  •  wordlabs.app  •  Root: 'bad' = not good, harmful, unpleasant</a:t>
             </a:r>
             <a:endParaRPr lang="en-US" sz="800" dirty="0"/>
           </a:p>
@@ -32922,7 +32856,7 @@
                 <a:ea typeface="Trebuchet MS" pitchFamily="34" charset="-122"/>
                 <a:cs typeface="Trebuchet MS" pitchFamily="34" charset="-120"/>
               </a:rPr>
-              <a:t>un-</a:t>
+              <a:t>su-</a:t>
             </a:r>
             <a:endParaRPr lang="en-US" sz="1300" dirty="0"/>
           </a:p>
@@ -33050,7 +32984,7 @@
                 <a:ea typeface="Trebuchet MS" pitchFamily="34" charset="-122"/>
                 <a:cs typeface="Trebuchet MS" pitchFamily="34" charset="-120"/>
               </a:rPr>
-              <a:t>-ly</a:t>
+              <a:t>--ly</a:t>
             </a:r>
             <a:endParaRPr lang="en-US" sz="1300" dirty="0"/>
           </a:p>
@@ -33114,7 +33048,7 @@
                 <a:ea typeface="Trebuchet MS" pitchFamily="34" charset="-122"/>
                 <a:cs typeface="Trebuchet MS" pitchFamily="34" charset="-120"/>
               </a:rPr>
-              <a:t>super-</a:t>
+              <a:t>de-</a:t>
             </a:r>
             <a:endParaRPr lang="en-US" sz="1300" dirty="0"/>
           </a:p>
@@ -33203,7 +33137,7 @@
                 <a:ea typeface="Trebuchet MS" pitchFamily="34" charset="-122"/>
                 <a:cs typeface="Trebuchet MS" pitchFamily="34" charset="-120"/>
               </a:rPr>
-              <a:t>-ness</a:t>
+              <a:t>--ness</a:t>
             </a:r>
             <a:endParaRPr lang="en-US" sz="1300" dirty="0"/>
           </a:p>
@@ -33267,7 +33201,7 @@
                 <a:ea typeface="Trebuchet MS" pitchFamily="34" charset="-122"/>
                 <a:cs typeface="Trebuchet MS" pitchFamily="34" charset="-120"/>
               </a:rPr>
-              <a:t>out-</a:t>
+              <a:t>un-</a:t>
             </a:r>
             <a:endParaRPr lang="en-US" sz="1300" dirty="0"/>
           </a:p>
@@ -33356,7 +33290,7 @@
                 <a:ea typeface="Trebuchet MS" pitchFamily="34" charset="-122"/>
                 <a:cs typeface="Trebuchet MS" pitchFamily="34" charset="-120"/>
               </a:rPr>
-              <a:t>-er</a:t>
+              <a:t>--er</a:t>
             </a:r>
             <a:endParaRPr lang="en-US" sz="1300" dirty="0"/>
           </a:p>
@@ -33420,7 +33354,7 @@
                 <a:ea typeface="Trebuchet MS" pitchFamily="34" charset="-122"/>
                 <a:cs typeface="Trebuchet MS" pitchFamily="34" charset="-120"/>
               </a:rPr>
-              <a:t>down-</a:t>
+              <a:t>re-</a:t>
             </a:r>
             <a:endParaRPr lang="en-US" sz="1300" dirty="0"/>
           </a:p>
@@ -33509,7 +33443,7 @@
                 <a:ea typeface="Trebuchet MS" pitchFamily="34" charset="-122"/>
                 <a:cs typeface="Trebuchet MS" pitchFamily="34" charset="-120"/>
               </a:rPr>
-              <a:t>-est</a:t>
+              <a:t>--est</a:t>
             </a:r>
             <a:endParaRPr lang="en-US" sz="1300" dirty="0"/>
           </a:p>
@@ -33662,7 +33596,7 @@
                 <a:ea typeface="Trebuchet MS" pitchFamily="34" charset="-122"/>
                 <a:cs typeface="Trebuchet MS" pitchFamily="34" charset="-120"/>
               </a:rPr>
-              <a:t>-ish</a:t>
+              <a:t>--ish</a:t>
             </a:r>
             <a:endParaRPr lang="en-US" sz="1300" dirty="0"/>
           </a:p>
@@ -33767,7 +33701,7 @@
                 <a:ea typeface="Trebuchet MS" pitchFamily="34" charset="-122"/>
                 <a:cs typeface="Trebuchet MS" pitchFamily="34" charset="-120"/>
               </a:rPr>
-              <a:t>badly</a:t>
+              <a:t>bad</a:t>
             </a:r>
             <a:endParaRPr lang="en-US" sz="1200" dirty="0"/>
           </a:p>
@@ -33833,7 +33767,7 @@
                 <a:ea typeface="Trebuchet MS" pitchFamily="34" charset="-122"/>
                 <a:cs typeface="Trebuchet MS" pitchFamily="34" charset="-120"/>
               </a:rPr>
-              <a:t>badness</a:t>
+              <a:t>badly</a:t>
             </a:r>
             <a:endParaRPr lang="en-US" sz="1200" dirty="0"/>
           </a:p>
@@ -33899,7 +33833,7 @@
                 <a:ea typeface="Trebuchet MS" pitchFamily="34" charset="-122"/>
                 <a:cs typeface="Trebuchet MS" pitchFamily="34" charset="-120"/>
               </a:rPr>
-              <a:t>badder</a:t>
+              <a:t>badness</a:t>
             </a:r>
             <a:endParaRPr lang="en-US" sz="1200" dirty="0"/>
           </a:p>
@@ -33965,7 +33899,7 @@
                 <a:ea typeface="Trebuchet MS" pitchFamily="34" charset="-122"/>
                 <a:cs typeface="Trebuchet MS" pitchFamily="34" charset="-120"/>
               </a:rPr>
-              <a:t>baddest</a:t>
+              <a:t>badder</a:t>
             </a:r>
             <a:endParaRPr lang="en-US" sz="1200" dirty="0"/>
           </a:p>
@@ -34031,7 +33965,7 @@
                 <a:ea typeface="Trebuchet MS" pitchFamily="34" charset="-122"/>
                 <a:cs typeface="Trebuchet MS" pitchFamily="34" charset="-120"/>
               </a:rPr>
-              <a:t>baddish</a:t>
+              <a:t>baddest</a:t>
             </a:r>
             <a:endParaRPr lang="en-US" sz="1200" dirty="0"/>
           </a:p>
@@ -34163,7 +34097,7 @@
                 <a:ea typeface="Trebuchet MS" pitchFamily="34" charset="-122"/>
                 <a:cs typeface="Trebuchet MS" pitchFamily="34" charset="-120"/>
               </a:rPr>
-              <a:t>bad-tempered</a:t>
+              <a:t>badish</a:t>
             </a:r>
             <a:endParaRPr lang="en-US" sz="1200" dirty="0"/>
           </a:p>
@@ -34229,7 +34163,7 @@
                 <a:ea typeface="Trebuchet MS" pitchFamily="34" charset="-122"/>
                 <a:cs typeface="Trebuchet MS" pitchFamily="34" charset="-120"/>
               </a:rPr>
-              <a:t>bad-mouth</a:t>
+              <a:t>badlands</a:t>
             </a:r>
             <a:endParaRPr lang="en-US" sz="1200" dirty="0"/>
           </a:p>
@@ -34521,7 +34455,7 @@
                 <a:ea typeface="Calibri" pitchFamily="34" charset="-122"/>
                 <a:cs typeface="Calibri" pitchFamily="34" charset="-120"/>
               </a:rPr>
-              <a:t>Word Labs  •  wordlabs.app  •  Root: 'bad' = not good, harmful, wrong</a:t>
+              <a:t>Word Labs  •  wordlabs.app  •  Root: 'bad' = not good, harmful, unpleasant</a:t>
             </a:r>
             <a:endParaRPr lang="en-US" sz="800" dirty="0"/>
           </a:p>
@@ -34685,7 +34619,7 @@
                 <a:ea typeface="Calibri" pitchFamily="34" charset="-122"/>
                 <a:cs typeface="Calibri" pitchFamily="34" charset="-120"/>
               </a:rPr>
-              <a:t>The core part of a word carrying its basic meaning. For example, 'bad' means 'not good, harmful, wrong'.</a:t>
+              <a:t>The core part of a word carrying its basic meaning. For example, 'bad' means 'not good, harmful, unpleasant'.</a:t>
             </a:r>
             <a:endParaRPr lang="en-US" sz="1350" dirty="0"/>
           </a:p>
@@ -35305,7 +35239,7 @@
                 <a:ea typeface="Calibri" pitchFamily="34" charset="-122"/>
                 <a:cs typeface="Calibri" pitchFamily="34" charset="-120"/>
               </a:rPr>
-              <a:t>Word Labs  •  wordlabs.app  •  Root: 'bad' = not good, harmful, wrong</a:t>
+              <a:t>Word Labs  •  wordlabs.app  •  Root: 'bad' = not good, harmful, unpleasant</a:t>
             </a:r>
             <a:endParaRPr lang="en-US" sz="800" dirty="0"/>
           </a:p>
@@ -35417,7 +35351,7 @@
                 <a:ea typeface="Calibri" pitchFamily="34" charset="-122"/>
                 <a:cs typeface="Calibri" pitchFamily="34" charset="-120"/>
               </a:rPr>
-              <a:t>1.  The word 'badly' is formed by adding the suffix '-ly' to the root 'bad'.</a:t>
+              <a:t>1.  'Badlands' is a compound word that uses 'bad' as its first part.</a:t>
             </a:r>
             <a:endParaRPr lang="en-US" sz="1300" dirty="0"/>
           </a:p>
@@ -35556,7 +35490,7 @@
                 <a:ea typeface="Calibri" pitchFamily="34" charset="-122"/>
                 <a:cs typeface="Calibri" pitchFamily="34" charset="-120"/>
               </a:rPr>
-              <a:t>2.  The root 'bad' comes from the Greek word for darkness.</a:t>
+              <a:t>2.  The word 'badly' is formed by adding the suffix '-ly' to 'bad'.</a:t>
             </a:r>
             <a:endParaRPr lang="en-US" sz="1300" dirty="0"/>
           </a:p>
@@ -35579,11 +35513,11 @@
             </a:avLst>
           </a:prstGeom>
           <a:solidFill>
-            <a:srgbClr val="FEE2E2"/>
-          </a:solidFill>
-          <a:ln w="12700">
-            <a:solidFill>
-              <a:srgbClr val="DC2626"/>
+            <a:srgbClr val="DCFCE7"/>
+          </a:solidFill>
+          <a:ln w="12700">
+            <a:solidFill>
+              <a:srgbClr val="16A34A"/>
             </a:solidFill>
             <a:prstDash val="solid"/>
           </a:ln>
@@ -35616,13 +35550,13 @@
             <a:r>
               <a:rPr lang="en-US" sz="1100" b="1" dirty="0">
                 <a:solidFill>
-                  <a:srgbClr val="DC2626"/>
+                  <a:srgbClr val="16A34A"/>
                 </a:solidFill>
                 <a:latin typeface="Trebuchet MS" pitchFamily="34" charset="0"/>
                 <a:ea typeface="Trebuchet MS" pitchFamily="34" charset="-122"/>
                 <a:cs typeface="Trebuchet MS" pitchFamily="34" charset="-120"/>
               </a:rPr>
-              <a:t>FALSE</a:t>
+              <a:t>TRUE</a:t>
             </a:r>
             <a:endParaRPr lang="en-US" sz="1100" dirty="0"/>
           </a:p>
@@ -35695,7 +35629,7 @@
                 <a:ea typeface="Calibri" pitchFamily="34" charset="-122"/>
                 <a:cs typeface="Calibri" pitchFamily="34" charset="-120"/>
               </a:rPr>
-              <a:t>3.  The word 'badness' means the quality of being bad.</a:t>
+              <a:t>3.  The word 'badish' means extremely terrible and very harmful.</a:t>
             </a:r>
             <a:endParaRPr lang="en-US" sz="1300" dirty="0"/>
           </a:p>
@@ -35718,11 +35652,11 @@
             </a:avLst>
           </a:prstGeom>
           <a:solidFill>
-            <a:srgbClr val="DCFCE7"/>
-          </a:solidFill>
-          <a:ln w="12700">
-            <a:solidFill>
-              <a:srgbClr val="16A34A"/>
+            <a:srgbClr val="FEE2E2"/>
+          </a:solidFill>
+          <a:ln w="12700">
+            <a:solidFill>
+              <a:srgbClr val="DC2626"/>
             </a:solidFill>
             <a:prstDash val="solid"/>
           </a:ln>
@@ -35755,13 +35689,13 @@
             <a:r>
               <a:rPr lang="en-US" sz="1100" b="1" dirty="0">
                 <a:solidFill>
-                  <a:srgbClr val="16A34A"/>
+                  <a:srgbClr val="DC2626"/>
                 </a:solidFill>
                 <a:latin typeface="Trebuchet MS" pitchFamily="34" charset="0"/>
                 <a:ea typeface="Trebuchet MS" pitchFamily="34" charset="-122"/>
                 <a:cs typeface="Trebuchet MS" pitchFamily="34" charset="-120"/>
               </a:rPr>
-              <a:t>TRUE</a:t>
+              <a:t>FALSE</a:t>
             </a:r>
             <a:endParaRPr lang="en-US" sz="1100" dirty="0"/>
           </a:p>
@@ -35834,7 +35768,7 @@
                 <a:ea typeface="Calibri" pitchFamily="34" charset="-122"/>
                 <a:cs typeface="Calibri" pitchFamily="34" charset="-120"/>
               </a:rPr>
-              <a:t>4.  Adding '-ish' to 'bad' makes the meaning slightly less strong, meaning a little bad.</a:t>
+              <a:t>4.  The root 'bad' comes from an ancient Greek word.</a:t>
             </a:r>
             <a:endParaRPr lang="en-US" sz="1300" dirty="0"/>
           </a:p>
@@ -35857,11 +35791,11 @@
             </a:avLst>
           </a:prstGeom>
           <a:solidFill>
-            <a:srgbClr val="DCFCE7"/>
-          </a:solidFill>
-          <a:ln w="12700">
-            <a:solidFill>
-              <a:srgbClr val="16A34A"/>
+            <a:srgbClr val="FEE2E2"/>
+          </a:solidFill>
+          <a:ln w="12700">
+            <a:solidFill>
+              <a:srgbClr val="DC2626"/>
             </a:solidFill>
             <a:prstDash val="solid"/>
           </a:ln>
@@ -35894,13 +35828,13 @@
             <a:r>
               <a:rPr lang="en-US" sz="1100" b="1" dirty="0">
                 <a:solidFill>
-                  <a:srgbClr val="16A34A"/>
+                  <a:srgbClr val="DC2626"/>
                 </a:solidFill>
                 <a:latin typeface="Trebuchet MS" pitchFamily="34" charset="0"/>
                 <a:ea typeface="Trebuchet MS" pitchFamily="34" charset="-122"/>
                 <a:cs typeface="Trebuchet MS" pitchFamily="34" charset="-120"/>
               </a:rPr>
-              <a:t>TRUE</a:t>
+              <a:t>FALSE</a:t>
             </a:r>
             <a:endParaRPr lang="en-US" sz="1100" dirty="0"/>
           </a:p>
@@ -35973,7 +35907,7 @@
                 <a:ea typeface="Calibri" pitchFamily="34" charset="-122"/>
                 <a:cs typeface="Calibri" pitchFamily="34" charset="-120"/>
               </a:rPr>
-              <a:t>5.  The word 'baddest' means only slightly bad.</a:t>
+              <a:t>5.  'Badness' contains the root 'bad' plus the suffix '-ness'.</a:t>
             </a:r>
             <a:endParaRPr lang="en-US" sz="1300" dirty="0"/>
           </a:p>
@@ -35996,11 +35930,11 @@
             </a:avLst>
           </a:prstGeom>
           <a:solidFill>
-            <a:srgbClr val="FEE2E2"/>
-          </a:solidFill>
-          <a:ln w="12700">
-            <a:solidFill>
-              <a:srgbClr val="DC2626"/>
+            <a:srgbClr val="DCFCE7"/>
+          </a:solidFill>
+          <a:ln w="12700">
+            <a:solidFill>
+              <a:srgbClr val="16A34A"/>
             </a:solidFill>
             <a:prstDash val="solid"/>
           </a:ln>
@@ -36033,13 +35967,13 @@
             <a:r>
               <a:rPr lang="en-US" sz="1100" b="1" dirty="0">
                 <a:solidFill>
-                  <a:srgbClr val="DC2626"/>
+                  <a:srgbClr val="16A34A"/>
                 </a:solidFill>
                 <a:latin typeface="Trebuchet MS" pitchFamily="34" charset="0"/>
                 <a:ea typeface="Trebuchet MS" pitchFamily="34" charset="-122"/>
                 <a:cs typeface="Trebuchet MS" pitchFamily="34" charset="-120"/>
               </a:rPr>
-              <a:t>FALSE</a:t>
+              <a:t>TRUE</a:t>
             </a:r>
             <a:endParaRPr lang="en-US" sz="1100" dirty="0"/>
           </a:p>
@@ -36331,7 +36265,7 @@
                 <a:ea typeface="Calibri" pitchFamily="34" charset="-122"/>
                 <a:cs typeface="Calibri" pitchFamily="34" charset="-120"/>
               </a:rPr>
-              <a:t>Word Labs  •  wordlabs.app  •  Root: 'bad' = not good, harmful, wrong</a:t>
+              <a:t>Word Labs  •  wordlabs.app  •  Root: 'bad' = not good, harmful, unpleasant</a:t>
             </a:r>
             <a:endParaRPr lang="en-US" sz="800" dirty="0"/>
           </a:p>
@@ -36468,7 +36402,7 @@
                 <a:ea typeface="Trebuchet MS" pitchFamily="34" charset="-122"/>
                 <a:cs typeface="Trebuchet MS" pitchFamily="34" charset="-120"/>
               </a:rPr>
-              <a:t>not good, harmful, wrong</a:t>
+              <a:t>not good, harmful, unpleasant</a:t>
             </a:r>
             <a:endParaRPr lang="en-US" sz="2000" dirty="0"/>
           </a:p>
@@ -36612,7 +36546,7 @@
                 <a:ea typeface="Trebuchet MS" pitchFamily="34" charset="-122"/>
                 <a:cs typeface="Trebuchet MS" pitchFamily="34" charset="-120"/>
               </a:rPr>
-              <a:t>badly</a:t>
+              <a:t>bad</a:t>
             </a:r>
             <a:endParaRPr lang="en-US" sz="1300" dirty="0"/>
           </a:p>
@@ -36678,7 +36612,7 @@
                 <a:ea typeface="Trebuchet MS" pitchFamily="34" charset="-122"/>
                 <a:cs typeface="Trebuchet MS" pitchFamily="34" charset="-120"/>
               </a:rPr>
-              <a:t>badness</a:t>
+              <a:t>badly</a:t>
             </a:r>
             <a:endParaRPr lang="en-US" sz="1300" dirty="0"/>
           </a:p>
@@ -36744,7 +36678,7 @@
                 <a:ea typeface="Trebuchet MS" pitchFamily="34" charset="-122"/>
                 <a:cs typeface="Trebuchet MS" pitchFamily="34" charset="-120"/>
               </a:rPr>
-              <a:t>badder</a:t>
+              <a:t>badness</a:t>
             </a:r>
             <a:endParaRPr lang="en-US" sz="1300" dirty="0"/>
           </a:p>
@@ -36810,7 +36744,7 @@
                 <a:ea typeface="Trebuchet MS" pitchFamily="34" charset="-122"/>
                 <a:cs typeface="Trebuchet MS" pitchFamily="34" charset="-120"/>
               </a:rPr>
-              <a:t>baddest</a:t>
+              <a:t>badder</a:t>
             </a:r>
             <a:endParaRPr lang="en-US" sz="1300" dirty="0"/>
           </a:p>
@@ -36876,7 +36810,7 @@
                 <a:ea typeface="Trebuchet MS" pitchFamily="34" charset="-122"/>
                 <a:cs typeface="Trebuchet MS" pitchFamily="34" charset="-120"/>
               </a:rPr>
-              <a:t>baddish</a:t>
+              <a:t>baddest</a:t>
             </a:r>
             <a:endParaRPr lang="en-US" sz="1300" dirty="0"/>
           </a:p>
@@ -37008,7 +36942,7 @@
                 <a:ea typeface="Trebuchet MS" pitchFamily="34" charset="-122"/>
                 <a:cs typeface="Trebuchet MS" pitchFamily="34" charset="-120"/>
               </a:rPr>
-              <a:t>bad-tempered</a:t>
+              <a:t>badish</a:t>
             </a:r>
             <a:endParaRPr lang="en-US" sz="1300" dirty="0"/>
           </a:p>
@@ -37300,7 +37234,7 @@
                 <a:ea typeface="Calibri" pitchFamily="34" charset="-122"/>
                 <a:cs typeface="Calibri" pitchFamily="34" charset="-120"/>
               </a:rPr>
-              <a:t>Word Labs  •  wordlabs.app  •  Root: 'bad' = not good, harmful, wrong</a:t>
+              <a:t>Word Labs  •  wordlabs.app  •  Root: 'bad' = not good, harmful, unpleasant</a:t>
             </a:r>
             <a:endParaRPr lang="en-US" sz="800" dirty="0"/>
           </a:p>
@@ -37601,7 +37535,7 @@
                 <a:ea typeface="Trebuchet MS" pitchFamily="34" charset="-122"/>
                 <a:cs typeface="Trebuchet MS" pitchFamily="34" charset="-120"/>
               </a:rPr>
-              <a:t>un-</a:t>
+              <a:t>su-</a:t>
             </a:r>
             <a:endParaRPr lang="en-US" sz="1300" dirty="0"/>
           </a:p>
@@ -37729,7 +37663,7 @@
                 <a:ea typeface="Trebuchet MS" pitchFamily="34" charset="-122"/>
                 <a:cs typeface="Trebuchet MS" pitchFamily="34" charset="-120"/>
               </a:rPr>
-              <a:t>-ly</a:t>
+              <a:t>--ly</a:t>
             </a:r>
             <a:endParaRPr lang="en-US" sz="1300" dirty="0"/>
           </a:p>
@@ -37793,7 +37727,7 @@
                 <a:ea typeface="Trebuchet MS" pitchFamily="34" charset="-122"/>
                 <a:cs typeface="Trebuchet MS" pitchFamily="34" charset="-120"/>
               </a:rPr>
-              <a:t>super-</a:t>
+              <a:t>de-</a:t>
             </a:r>
             <a:endParaRPr lang="en-US" sz="1300" dirty="0"/>
           </a:p>
@@ -37882,7 +37816,7 @@
                 <a:ea typeface="Trebuchet MS" pitchFamily="34" charset="-122"/>
                 <a:cs typeface="Trebuchet MS" pitchFamily="34" charset="-120"/>
               </a:rPr>
-              <a:t>-ness</a:t>
+              <a:t>--ness</a:t>
             </a:r>
             <a:endParaRPr lang="en-US" sz="1300" dirty="0"/>
           </a:p>
@@ -37946,7 +37880,7 @@
                 <a:ea typeface="Trebuchet MS" pitchFamily="34" charset="-122"/>
                 <a:cs typeface="Trebuchet MS" pitchFamily="34" charset="-120"/>
               </a:rPr>
-              <a:t>out-</a:t>
+              <a:t>un-</a:t>
             </a:r>
             <a:endParaRPr lang="en-US" sz="1300" dirty="0"/>
           </a:p>
@@ -38035,7 +37969,7 @@
                 <a:ea typeface="Trebuchet MS" pitchFamily="34" charset="-122"/>
                 <a:cs typeface="Trebuchet MS" pitchFamily="34" charset="-120"/>
               </a:rPr>
-              <a:t>-er</a:t>
+              <a:t>--er</a:t>
             </a:r>
             <a:endParaRPr lang="en-US" sz="1300" dirty="0"/>
           </a:p>
@@ -38099,7 +38033,7 @@
                 <a:ea typeface="Trebuchet MS" pitchFamily="34" charset="-122"/>
                 <a:cs typeface="Trebuchet MS" pitchFamily="34" charset="-120"/>
               </a:rPr>
-              <a:t>down-</a:t>
+              <a:t>re-</a:t>
             </a:r>
             <a:endParaRPr lang="en-US" sz="1300" dirty="0"/>
           </a:p>
@@ -38188,7 +38122,7 @@
                 <a:ea typeface="Trebuchet MS" pitchFamily="34" charset="-122"/>
                 <a:cs typeface="Trebuchet MS" pitchFamily="34" charset="-120"/>
               </a:rPr>
-              <a:t>-est</a:t>
+              <a:t>--est</a:t>
             </a:r>
             <a:endParaRPr lang="en-US" sz="1300" dirty="0"/>
           </a:p>
@@ -38341,7 +38275,7 @@
                 <a:ea typeface="Trebuchet MS" pitchFamily="34" charset="-122"/>
                 <a:cs typeface="Trebuchet MS" pitchFamily="34" charset="-120"/>
               </a:rPr>
-              <a:t>-ish</a:t>
+              <a:t>--ish</a:t>
             </a:r>
             <a:endParaRPr lang="en-US" sz="1300" dirty="0"/>
           </a:p>
@@ -38453,7 +38387,7 @@
                 <a:ea typeface="Trebuchet MS" pitchFamily="34" charset="-122"/>
                 <a:cs typeface="Trebuchet MS" pitchFamily="34" charset="-120"/>
               </a:rPr>
-              <a:t>un-</a:t>
+              <a:t>su-</a:t>
             </a:r>
             <a:endParaRPr lang="en-US" sz="1300" dirty="0"/>
           </a:p>
@@ -38619,7 +38553,7 @@
         <p:spPr>
           <a:xfrm>
             <a:off x="4178808" y="4178808"/>
-            <a:ext cx="822960" cy="420624"/>
+            <a:ext cx="950976" cy="420624"/>
           </a:xfrm>
           <a:prstGeom prst="rect">
             <a:avLst>
@@ -38653,7 +38587,7 @@
         <p:spPr>
           <a:xfrm>
             <a:off x="4178808" y="4178808"/>
-            <a:ext cx="822960" cy="420624"/>
+            <a:ext cx="950976" cy="420624"/>
           </a:xfrm>
           <a:prstGeom prst="rect">
             <a:avLst/>
@@ -38677,7 +38611,7 @@
                 <a:ea typeface="Trebuchet MS" pitchFamily="34" charset="-122"/>
                 <a:cs typeface="Trebuchet MS" pitchFamily="34" charset="-120"/>
               </a:rPr>
-              <a:t>-ly</a:t>
+              <a:t>--ly</a:t>
             </a:r>
             <a:endParaRPr lang="en-US" sz="1300" dirty="0"/>
           </a:p>
@@ -38691,7 +38625,7 @@
         </p:nvSpPr>
         <p:spPr>
           <a:xfrm>
-            <a:off x="5074920" y="4178808"/>
+            <a:off x="5202936" y="4178808"/>
             <a:ext cx="365760" cy="420624"/>
           </a:xfrm>
           <a:prstGeom prst="rect">
@@ -38730,7 +38664,7 @@
         </p:nvSpPr>
         <p:spPr>
           <a:xfrm>
-            <a:off x="5486400" y="4178808"/>
+            <a:off x="5614416" y="4178808"/>
             <a:ext cx="2194560" cy="420624"/>
           </a:xfrm>
           <a:prstGeom prst="rect">
@@ -38757,7 +38691,7 @@
         </p:nvSpPr>
         <p:spPr>
           <a:xfrm>
-            <a:off x="5486400" y="4178808"/>
+            <a:off x="5614416" y="4178808"/>
             <a:ext cx="2194560" cy="420624"/>
           </a:xfrm>
           <a:prstGeom prst="rect">
@@ -38782,7 +38716,7 @@
                 <a:ea typeface="Trebuchet MS" pitchFamily="34" charset="-122"/>
                 <a:cs typeface="Trebuchet MS" pitchFamily="34" charset="-120"/>
               </a:rPr>
-              <a:t>badly</a:t>
+              <a:t>bad</a:t>
             </a:r>
             <a:endParaRPr lang="en-US" sz="1400" dirty="0"/>
           </a:p>
@@ -39074,7 +39008,7 @@
                 <a:ea typeface="Calibri" pitchFamily="34" charset="-122"/>
                 <a:cs typeface="Calibri" pitchFamily="34" charset="-120"/>
               </a:rPr>
-              <a:t>Word Labs  •  wordlabs.app  •  Root: 'bad' = not good, harmful, wrong</a:t>
+              <a:t>Word Labs  •  wordlabs.app  •  Root: 'bad' = not good, harmful, unpleasant</a:t>
             </a:r>
             <a:endParaRPr lang="en-US" sz="800" dirty="0"/>
           </a:p>
@@ -39186,7 +39120,7 @@
                 <a:ea typeface="Trebuchet MS" pitchFamily="34" charset="-122"/>
                 <a:cs typeface="Trebuchet MS" pitchFamily="34" charset="-120"/>
               </a:rPr>
-              <a:t>badly</a:t>
+              <a:t>bad</a:t>
             </a:r>
             <a:endParaRPr lang="en-US" sz="1200" dirty="0"/>
           </a:p>
@@ -39252,7 +39186,7 @@
                 <a:ea typeface="Calibri" pitchFamily="34" charset="-122"/>
                 <a:cs typeface="Calibri" pitchFamily="34" charset="-120"/>
               </a:rPr>
-              <a:t>In a way that is not good or not done well, like playing a game badly.</a:t>
+              <a:t>Something that is not good or causes harm, like bad weather or a bad smell.</a:t>
             </a:r>
             <a:endParaRPr lang="en-US" sz="1200" dirty="0"/>
           </a:p>
@@ -39325,7 +39259,7 @@
                 <a:ea typeface="Trebuchet MS" pitchFamily="34" charset="-122"/>
                 <a:cs typeface="Trebuchet MS" pitchFamily="34" charset="-120"/>
               </a:rPr>
-              <a:t>badness</a:t>
+              <a:t>badly</a:t>
             </a:r>
             <a:endParaRPr lang="en-US" sz="1200" dirty="0"/>
           </a:p>
@@ -39391,7 +39325,7 @@
                 <a:ea typeface="Calibri" pitchFamily="34" charset="-122"/>
                 <a:cs typeface="Calibri" pitchFamily="34" charset="-120"/>
               </a:rPr>
-              <a:t>More bad than something else; used when comparing two things.</a:t>
+              <a:t>The quality of being wicked or not good.</a:t>
             </a:r>
             <a:endParaRPr lang="en-US" sz="1200" dirty="0"/>
           </a:p>
@@ -39464,7 +39398,7 @@
                 <a:ea typeface="Trebuchet MS" pitchFamily="34" charset="-122"/>
                 <a:cs typeface="Trebuchet MS" pitchFamily="34" charset="-120"/>
               </a:rPr>
-              <a:t>badder</a:t>
+              <a:t>badness</a:t>
             </a:r>
             <a:endParaRPr lang="en-US" sz="1200" dirty="0"/>
           </a:p>
@@ -39530,7 +39464,7 @@
                 <a:ea typeface="Calibri" pitchFamily="34" charset="-122"/>
                 <a:cs typeface="Calibri" pitchFamily="34" charset="-120"/>
               </a:rPr>
-              <a:t>Slightly bad or a little bit not good.</a:t>
+              <a:t>The most bad of all; used to describe the worst thing in a group.</a:t>
             </a:r>
             <a:endParaRPr lang="en-US" sz="1200" dirty="0"/>
           </a:p>
@@ -39603,7 +39537,7 @@
                 <a:ea typeface="Trebuchet MS" pitchFamily="34" charset="-122"/>
                 <a:cs typeface="Trebuchet MS" pitchFamily="34" charset="-120"/>
               </a:rPr>
-              <a:t>baddest</a:t>
+              <a:t>badder</a:t>
             </a:r>
             <a:endParaRPr lang="en-US" sz="1200" dirty="0"/>
           </a:p>
@@ -39669,7 +39603,7 @@
                 <a:ea typeface="Calibri" pitchFamily="34" charset="-122"/>
                 <a:cs typeface="Calibri" pitchFamily="34" charset="-120"/>
               </a:rPr>
-              <a:t>A person or character in a story who does bad or evil things, like a villain.</a:t>
+              <a:t>A villain or wicked character, often in a story or movie.</a:t>
             </a:r>
             <a:endParaRPr lang="en-US" sz="1200" dirty="0"/>
           </a:p>
@@ -39742,7 +39676,7 @@
                 <a:ea typeface="Trebuchet MS" pitchFamily="34" charset="-122"/>
                 <a:cs typeface="Trebuchet MS" pitchFamily="34" charset="-120"/>
               </a:rPr>
-              <a:t>baddish</a:t>
+              <a:t>baddest</a:t>
             </a:r>
             <a:endParaRPr lang="en-US" sz="1200" dirty="0"/>
           </a:p>
@@ -39808,7 +39742,7 @@
                 <a:ea typeface="Calibri" pitchFamily="34" charset="-122"/>
                 <a:cs typeface="Calibri" pitchFamily="34" charset="-120"/>
               </a:rPr>
-              <a:t>The most bad of all; used when comparing three or more things.</a:t>
+              <a:t>More bad than something else; a comparison showing something is worse.</a:t>
             </a:r>
             <a:endParaRPr lang="en-US" sz="1200" dirty="0"/>
           </a:p>
@@ -39947,7 +39881,7 @@
                 <a:ea typeface="Calibri" pitchFamily="34" charset="-122"/>
                 <a:cs typeface="Calibri" pitchFamily="34" charset="-120"/>
               </a:rPr>
-              <a:t>Easily annoyed or grumpy; having a bad mood often.</a:t>
+              <a:t>Somewhat bad but not completely terrible; a little bit unpleasant.</a:t>
             </a:r>
             <a:endParaRPr lang="en-US" sz="1200" dirty="0"/>
           </a:p>
@@ -40020,7 +39954,7 @@
                 <a:ea typeface="Trebuchet MS" pitchFamily="34" charset="-122"/>
                 <a:cs typeface="Trebuchet MS" pitchFamily="34" charset="-120"/>
               </a:rPr>
-              <a:t>bad-tempered</a:t>
+              <a:t>badish</a:t>
             </a:r>
             <a:endParaRPr lang="en-US" sz="1200" dirty="0"/>
           </a:p>
@@ -40086,7 +40020,7 @@
                 <a:ea typeface="Calibri" pitchFamily="34" charset="-122"/>
                 <a:cs typeface="Calibri" pitchFamily="34" charset="-120"/>
               </a:rPr>
-              <a:t>The quality of being bad or doing wrong things.</a:t>
+              <a:t>When something is done in a poor or harmful way, like playing badly in a game.</a:t>
             </a:r>
             <a:endParaRPr lang="en-US" sz="1200" dirty="0"/>
           </a:p>
@@ -40378,7 +40312,7 @@
                 <a:ea typeface="Calibri" pitchFamily="34" charset="-122"/>
                 <a:cs typeface="Calibri" pitchFamily="34" charset="-120"/>
               </a:rPr>
-              <a:t>Word Labs  •  wordlabs.app  •  Root: 'bad' = not good, harmful, wrong</a:t>
+              <a:t>Word Labs  •  wordlabs.app  •  Root: 'bad' = not good, harmful, unpleasant</a:t>
             </a:r>
             <a:endParaRPr lang="en-US" sz="800" dirty="0"/>
           </a:p>
@@ -40581,7 +40515,7 @@
                 <a:ea typeface="Calibri" pitchFamily="34" charset="-122"/>
                 <a:cs typeface="Calibri" pitchFamily="34" charset="-120"/>
               </a:rPr>
-              <a:t>The footballer played badly in the first half, but improved after the break.</a:t>
+              <a:t>The storm caused badly damaged roads all across the town.</a:t>
             </a:r>
             <a:endParaRPr lang="en-US" sz="1500" dirty="0"/>
           </a:p>
@@ -40745,7 +40679,7 @@
                 <a:ea typeface="Calibri" pitchFamily="34" charset="-122"/>
                 <a:cs typeface="Calibri" pitchFamily="34" charset="-120"/>
               </a:rPr>
-              <a:t>The badness of the storm surprised everyone in the town.</a:t>
+              <a:t>The badness of the villain's plan was obvious to everyone in the story.</a:t>
             </a:r>
             <a:endParaRPr lang="en-US" sz="1500" dirty="0"/>
           </a:p>
@@ -40909,7 +40843,7 @@
                 <a:ea typeface="Calibri" pitchFamily="34" charset="-122"/>
                 <a:cs typeface="Calibri" pitchFamily="34" charset="-120"/>
               </a:rPr>
-              <a:t>The bad-tempered cat hissed at anyone who came near her kittens.</a:t>
+              <a:t>She played so badly in the first half that the coach asked her to rest.</a:t>
             </a:r>
             <a:endParaRPr lang="en-US" sz="1500" dirty="0"/>
           </a:p>
